--- a/Modul Minna 1/Bab 16/41. Minna 1 Tata Bahasa Bab 16 - Slide.pptx
+++ b/Modul Minna 1/Bab 16/41. Minna 1 Tata Bahasa Bab 16 - Slide.pptx
@@ -3499,7 +3499,7 @@
                 <a:ea typeface="Arial" pitchFamily="34" charset="-122"/>
                 <a:cs typeface="Arial" pitchFamily="34" charset="-120"/>
               </a:rPr>
-              <a:t>おおさかはたべものがおいしいです。</a:t>
+              <a:t>スラバヤはたべものがおいしいです。</a:t>
             </a:r>
             <a:endParaRPr lang="en-US" sz="1700" dirty="0"/>
           </a:p>
@@ -3538,7 +3538,7 @@
                 <a:ea typeface="Arial" pitchFamily="34" charset="-122"/>
                 <a:cs typeface="Arial" pitchFamily="34" charset="-120"/>
               </a:rPr>
-              <a:t>Oosaka wa tabemono ga oishii desu</a:t>
+              <a:t>Surabaya wa tabemono ga oishii desu</a:t>
             </a:r>
             <a:pPr indent="0" marL="0">
               <a:buNone/>
@@ -3566,7 +3566,7 @@
                 <a:ea typeface="Arial" pitchFamily="34" charset="-122"/>
                 <a:cs typeface="Arial" pitchFamily="34" charset="-120"/>
               </a:rPr>
-              <a:t>Osaka makanannya enak.</a:t>
+              <a:t>Surabaya makanannya enak.</a:t>
             </a:r>
             <a:endParaRPr lang="en-US" sz="950" dirty="0"/>
           </a:p>
@@ -5208,7 +5208,7 @@
                 <a:ea typeface="Arial" pitchFamily="34" charset="-122"/>
                 <a:cs typeface="Arial" pitchFamily="34" charset="-120"/>
               </a:rPr>
-              <a:t>Payung Sdr. Budi yang mana?</a:t>
+              <a:t>Payung Budi yang mana?</a:t>
             </a:r>
             <a:endParaRPr lang="en-US" sz="950" dirty="0"/>
           </a:p>
